--- a/index/designs/y9-l8/l1-facilities-vocab/l1-facilities-vocab.pptx
+++ b/index/designs/y9-l8/l1-facilities-vocab/l1-facilities-vocab.pptx
@@ -2026,15 +2026,6 @@
               </a:rPr>
               <a:t>学校设施</a:t>
             </a:r>
-            <a:pPr algn="ctr" indent="0" marL="0">
-              <a:lnSpc>
-                <a:spcPts val="6210"/>
-              </a:lnSpc>
-              <a:spcAft>
-                <a:spcPts val="1200"/>
-              </a:spcAft>
-              <a:buNone/>
-            </a:pPr>
             <a:r>
               <a:rPr lang="en-US" sz="5400" b="1" dirty="0">
                 <a:solidFill>
@@ -2046,15 +2037,6 @@
               </a:rPr>
               <a:t>·</a:t>
             </a:r>
-            <a:pPr algn="ctr" indent="0" marL="0">
-              <a:lnSpc>
-                <a:spcPts val="6210"/>
-              </a:lnSpc>
-              <a:spcAft>
-                <a:spcPts val="1200"/>
-              </a:spcAft>
-              <a:buNone/>
-            </a:pPr>
             <a:r>
               <a:rPr lang="en-US" sz="5400" dirty="0">
                 <a:solidFill>
@@ -2213,9 +2195,6 @@
               </a:rPr>
               <a:t>⏱ </a:t>
             </a:r>
-            <a:pPr algn="ctr" indent="0" marL="0">
-              <a:buNone/>
-            </a:pPr>
             <a:r>
               <a:rPr lang="en-US" sz="1000" b="1" dirty="0">
                 <a:solidFill>
@@ -2302,9 +2281,6 @@
               </a:rPr>
               <a:t>📚 </a:t>
             </a:r>
-            <a:pPr algn="ctr" indent="0" marL="0">
-              <a:buNone/>
-            </a:pPr>
             <a:r>
               <a:rPr lang="en-US" sz="1000" b="1" dirty="0">
                 <a:solidFill>
@@ -2391,9 +2367,6 @@
               </a:rPr>
               <a:t>🗣 </a:t>
             </a:r>
-            <a:pPr algn="ctr" indent="0" marL="0">
-              <a:buNone/>
-            </a:pPr>
             <a:r>
               <a:rPr lang="en-US" sz="1000" b="1" dirty="0">
                 <a:solidFill>
@@ -2480,9 +2453,6 @@
               </a:rPr>
               <a:t>🎯 </a:t>
             </a:r>
-            <a:pPr algn="ctr" indent="0" marL="0">
-              <a:buNone/>
-            </a:pPr>
             <a:r>
               <a:rPr lang="en-US" sz="1000" b="1" dirty="0">
                 <a:solidFill>
@@ -2988,12 +2958,6 @@
               </a:rPr>
               <a:t>Teacher models on projector — writes 3 sentences live, thinking aloud: </a:t>
             </a:r>
-            <a:pPr algn="l" indent="0" marL="0">
-              <a:lnSpc>
-                <a:spcPts val="1215"/>
-              </a:lnSpc>
-              <a:buNone/>
-            </a:pPr>
             <a:r>
               <a:rPr lang="en-US" sz="900" b="1" dirty="0">
                 <a:solidFill>
@@ -3118,12 +3082,6 @@
               </a:rPr>
               <a:t>Individual writing (6 min): paragraph with </a:t>
             </a:r>
-            <a:pPr algn="l" indent="0" marL="0">
-              <a:lnSpc>
-                <a:spcPts val="1215"/>
-              </a:lnSpc>
-              <a:buNone/>
-            </a:pPr>
             <a:r>
               <a:rPr lang="en-US" sz="900" b="1" dirty="0">
                 <a:solidFill>
@@ -3135,12 +3093,6 @@
               </a:rPr>
               <a:t>at least six facilities</a:t>
             </a:r>
-            <a:pPr algn="l" indent="0" marL="0">
-              <a:lnSpc>
-                <a:spcPts val="1215"/>
-              </a:lnSpc>
-              <a:buNone/>
-            </a:pPr>
             <a:r>
               <a:rPr lang="en-US" sz="900" dirty="0">
                 <a:solidFill>
@@ -3452,12 +3404,6 @@
               </a:rPr>
               <a:t>OTR 2:</a:t>
             </a:r>
-            <a:pPr algn="l" indent="0" marL="0">
-              <a:lnSpc>
-                <a:spcPts val="1040"/>
-              </a:lnSpc>
-              <a:buNone/>
-            </a:pPr>
             <a:r>
               <a:rPr lang="en-US" sz="800" dirty="0">
                 <a:solidFill>
@@ -3585,12 +3531,6 @@
               </a:rPr>
               <a:t>我来介绍一下我们学校。我们学校有</a:t>
             </a:r>
-            <a:pPr algn="l" indent="0" marL="0">
-              <a:lnSpc>
-                <a:spcPts val="1750"/>
-              </a:lnSpc>
-              <a:buNone/>
-            </a:pPr>
             <a:r>
               <a:rPr lang="en-US" sz="1250" b="1" dirty="0">
                 <a:solidFill>
@@ -3602,12 +3542,6 @@
               </a:rPr>
               <a:t>＿</a:t>
             </a:r>
-            <a:pPr algn="l" indent="0" marL="0">
-              <a:lnSpc>
-                <a:spcPts val="1750"/>
-              </a:lnSpc>
-              <a:buNone/>
-            </a:pPr>
             <a:r>
               <a:rPr lang="en-US" sz="1250" dirty="0">
                 <a:solidFill>
@@ -3619,12 +3553,6 @@
               </a:rPr>
               <a:t>幢教学楼、</a:t>
             </a:r>
-            <a:pPr algn="l" indent="0" marL="0">
-              <a:lnSpc>
-                <a:spcPts val="1750"/>
-              </a:lnSpc>
-              <a:buNone/>
-            </a:pPr>
             <a:r>
               <a:rPr lang="en-US" sz="1250" b="1" dirty="0">
                 <a:solidFill>
@@ -3636,12 +3564,6 @@
               </a:rPr>
               <a:t>＿</a:t>
             </a:r>
-            <a:pPr algn="l" indent="0" marL="0">
-              <a:lnSpc>
-                <a:spcPts val="1750"/>
-              </a:lnSpc>
-              <a:buNone/>
-            </a:pPr>
             <a:r>
               <a:rPr lang="en-US" sz="1250" dirty="0">
                 <a:solidFill>
@@ -3653,12 +3575,6 @@
               </a:rPr>
               <a:t>个＿、</a:t>
             </a:r>
-            <a:pPr algn="l" indent="0" marL="0">
-              <a:lnSpc>
-                <a:spcPts val="1750"/>
-              </a:lnSpc>
-              <a:buNone/>
-            </a:pPr>
             <a:r>
               <a:rPr lang="en-US" sz="1250" b="1" dirty="0">
                 <a:solidFill>
@@ -3670,12 +3586,6 @@
               </a:rPr>
               <a:t>＿</a:t>
             </a:r>
-            <a:pPr algn="l" indent="0" marL="0">
-              <a:lnSpc>
-                <a:spcPts val="1750"/>
-              </a:lnSpc>
-              <a:buNone/>
-            </a:pPr>
             <a:r>
               <a:rPr lang="en-US" sz="1250" dirty="0">
                 <a:solidFill>
@@ -3687,12 +3597,6 @@
               </a:rPr>
               <a:t>个＿和</a:t>
             </a:r>
-            <a:pPr algn="l" indent="0" marL="0">
-              <a:lnSpc>
-                <a:spcPts val="1750"/>
-              </a:lnSpc>
-              <a:buNone/>
-            </a:pPr>
             <a:r>
               <a:rPr lang="en-US" sz="1250" b="1" dirty="0">
                 <a:solidFill>
@@ -3704,12 +3608,6 @@
               </a:rPr>
               <a:t>＿</a:t>
             </a:r>
-            <a:pPr algn="l" indent="0" marL="0">
-              <a:lnSpc>
-                <a:spcPts val="1750"/>
-              </a:lnSpc>
-              <a:buNone/>
-            </a:pPr>
             <a:r>
               <a:rPr lang="en-US" sz="1250" dirty="0">
                 <a:solidFill>
@@ -4826,12 +4724,6 @@
               </a:rPr>
               <a:t>教学楼</a:t>
             </a:r>
-            <a:pPr algn="l" indent="0" marL="0">
-              <a:lnSpc>
-                <a:spcPts val="1500"/>
-              </a:lnSpc>
-              <a:buNone/>
-            </a:pPr>
             <a:r>
               <a:rPr lang="en-US" sz="1000" dirty="0">
                 <a:solidFill>
@@ -4843,12 +4735,6 @@
               </a:rPr>
               <a:t> — 整栋楼 (whole building) — </a:t>
             </a:r>
-            <a:pPr algn="l" indent="0" marL="0">
-              <a:lnSpc>
-                <a:spcPts val="1500"/>
-              </a:lnSpc>
-              <a:buNone/>
-            </a:pPr>
             <a:r>
               <a:rPr lang="en-US" sz="1000" b="1" dirty="0">
                 <a:solidFill>
@@ -4860,12 +4746,6 @@
               </a:rPr>
               <a:t>幢</a:t>
             </a:r>
-            <a:pPr algn="l" indent="0" marL="0">
-              <a:lnSpc>
-                <a:spcPts val="1500"/>
-              </a:lnSpc>
-              <a:buNone/>
-            </a:pPr>
             <a:r>
               <a:rPr lang="en-US" sz="1000" dirty="0">
                 <a:solidFill>
@@ -4878,12 +4758,6 @@
               <a:t>
 </a:t>
             </a:r>
-            <a:pPr algn="l" indent="0" marL="0">
-              <a:lnSpc>
-                <a:spcPts val="1500"/>
-              </a:lnSpc>
-              <a:buNone/>
-            </a:pPr>
             <a:r>
               <a:rPr lang="en-US" sz="1000" b="1" dirty="0">
                 <a:solidFill>
@@ -4895,12 +4769,6 @@
               </a:rPr>
               <a:t>图书馆</a:t>
             </a:r>
-            <a:pPr algn="l" indent="0" marL="0">
-              <a:lnSpc>
-                <a:spcPts val="1500"/>
-              </a:lnSpc>
-              <a:buNone/>
-            </a:pPr>
             <a:r>
               <a:rPr lang="en-US" sz="1000" dirty="0">
                 <a:solidFill>
@@ -4912,12 +4780,6 @@
               </a:rPr>
               <a:t> — 一个房间/一栋楼里的一部分 — </a:t>
             </a:r>
-            <a:pPr algn="l" indent="0" marL="0">
-              <a:lnSpc>
-                <a:spcPts val="1500"/>
-              </a:lnSpc>
-              <a:buNone/>
-            </a:pPr>
             <a:r>
               <a:rPr lang="en-US" sz="1000" b="1" dirty="0">
                 <a:solidFill>
@@ -6392,12 +6254,6 @@
               </a:rPr>
               <a:t>Setup (projector only): display 8 facility nouns one at a time — </a:t>
             </a:r>
-            <a:pPr algn="l" indent="0" marL="0">
-              <a:lnSpc>
-                <a:spcPts val="1148"/>
-              </a:lnSpc>
-              <a:buNone/>
-            </a:pPr>
             <a:r>
               <a:rPr lang="en-US" sz="850" b="1" dirty="0">
                 <a:solidFill>
@@ -6635,12 +6491,6 @@
               </a:rPr>
               <a:t>Correct = 1 point. If wrong, the other team may </a:t>
             </a:r>
-            <a:pPr algn="l" indent="0" marL="0">
-              <a:lnSpc>
-                <a:spcPts val="1148"/>
-              </a:lnSpc>
-              <a:buNone/>
-            </a:pPr>
             <a:r>
               <a:rPr lang="en-US" sz="850" b="1" dirty="0">
                 <a:solidFill>
@@ -6652,12 +6502,6 @@
               </a:rPr>
               <a:t>steal</a:t>
             </a:r>
-            <a:pPr algn="l" indent="0" marL="0">
-              <a:lnSpc>
-                <a:spcPts val="1148"/>
-              </a:lnSpc>
-              <a:buNone/>
-            </a:pPr>
             <a:r>
               <a:rPr lang="en-US" sz="850" dirty="0">
                 <a:solidFill>
@@ -6902,12 +6746,6 @@
               </a:rPr>
               <a:t>If a student hesitates, teacher may offer the </a:t>
             </a:r>
-            <a:pPr algn="l" indent="0" marL="0">
-              <a:lnSpc>
-                <a:spcPts val="1260"/>
-              </a:lnSpc>
-              <a:buNone/>
-            </a:pPr>
             <a:r>
               <a:rPr lang="en-US" sz="900" b="1" dirty="0">
                 <a:solidFill>
@@ -6919,12 +6757,6 @@
               </a:rPr>
               <a:t>first sound</a:t>
             </a:r>
-            <a:pPr algn="l" indent="0" marL="0">
-              <a:lnSpc>
-                <a:spcPts val="1260"/>
-              </a:lnSpc>
-              <a:buNone/>
-            </a:pPr>
             <a:r>
               <a:rPr lang="en-US" sz="900" dirty="0">
                 <a:solidFill>
@@ -7056,12 +6888,6 @@
               </a:rPr>
               <a:t>Winning answers for fluent speakers must be given as a </a:t>
             </a:r>
-            <a:pPr algn="l" indent="0" marL="0">
-              <a:lnSpc>
-                <a:spcPts val="1260"/>
-              </a:lnSpc>
-              <a:buNone/>
-            </a:pPr>
             <a:r>
               <a:rPr lang="en-US" sz="900" b="1" dirty="0">
                 <a:solidFill>
@@ -7073,12 +6899,6 @@
               </a:rPr>
               <a:t>full sentence</a:t>
             </a:r>
-            <a:pPr algn="l" indent="0" marL="0">
-              <a:lnSpc>
-                <a:spcPts val="1260"/>
-              </a:lnSpc>
-              <a:buNone/>
-            </a:pPr>
             <a:r>
               <a:rPr lang="en-US" sz="900" dirty="0">
                 <a:solidFill>
@@ -7615,9 +7435,6 @@
               </a:rPr>
               <a:t>Hold up fingers: </a:t>
             </a:r>
-            <a:pPr algn="l" indent="0" marL="0">
-              <a:buNone/>
-            </a:pPr>
             <a:r>
               <a:rPr lang="en-US" sz="900" b="1" dirty="0">
                 <a:solidFill>
@@ -7629,9 +7446,6 @@
               </a:rPr>
               <a:t>3</a:t>
             </a:r>
-            <a:pPr algn="l" indent="0" marL="0">
-              <a:buNone/>
-            </a:pPr>
             <a:r>
               <a:rPr lang="en-US" sz="900" dirty="0">
                 <a:solidFill>
@@ -7643,9 +7457,6 @@
               </a:rPr>
               <a:t> = 完全可以 · </a:t>
             </a:r>
-            <a:pPr algn="l" indent="0" marL="0">
-              <a:buNone/>
-            </a:pPr>
             <a:r>
               <a:rPr lang="en-US" sz="900" b="1" dirty="0">
                 <a:solidFill>
@@ -7657,9 +7468,6 @@
               </a:rPr>
               <a:t>2</a:t>
             </a:r>
-            <a:pPr algn="l" indent="0" marL="0">
-              <a:buNone/>
-            </a:pPr>
             <a:r>
               <a:rPr lang="en-US" sz="900" dirty="0">
                 <a:solidFill>
@@ -7671,9 +7479,6 @@
               </a:rPr>
               <a:t> = 差不多 · </a:t>
             </a:r>
-            <a:pPr algn="l" indent="0" marL="0">
-              <a:buNone/>
-            </a:pPr>
             <a:r>
               <a:rPr lang="en-US" sz="900" b="1" dirty="0">
                 <a:solidFill>
@@ -7685,9 +7490,6 @@
               </a:rPr>
               <a:t>1</a:t>
             </a:r>
-            <a:pPr algn="l" indent="0" marL="0">
-              <a:buNone/>
-            </a:pPr>
             <a:r>
               <a:rPr lang="en-US" sz="900" dirty="0">
                 <a:solidFill>
@@ -7896,9 +7698,6 @@
               </a:rPr>
               <a:t>Teacher note:</a:t>
             </a:r>
-            <a:pPr algn="l" indent="0" marL="0">
-              <a:buNone/>
-            </a:pPr>
             <a:r>
               <a:rPr lang="en-US" sz="900" dirty="0">
                 <a:solidFill>
@@ -8122,12 +7921,6 @@
               </a:rPr>
               <a:t>我们学校有</a:t>
             </a:r>
-            <a:pPr algn="l" indent="0" marL="0">
-              <a:lnSpc>
-                <a:spcPts val="2380"/>
-              </a:lnSpc>
-              <a:buNone/>
-            </a:pPr>
             <a:r>
               <a:rPr lang="en-US" sz="1700" b="1" dirty="0">
                 <a:solidFill>
@@ -8139,12 +7932,6 @@
               </a:rPr>
               <a:t>＿</a:t>
             </a:r>
-            <a:pPr algn="l" indent="0" marL="0">
-              <a:lnSpc>
-                <a:spcPts val="2380"/>
-              </a:lnSpc>
-              <a:buNone/>
-            </a:pPr>
             <a:r>
               <a:rPr lang="en-US" sz="1700" dirty="0">
                 <a:solidFill>
@@ -8156,12 +7943,6 @@
               </a:rPr>
               <a:t>幢教学楼和一个</a:t>
             </a:r>
-            <a:pPr algn="l" indent="0" marL="0">
-              <a:lnSpc>
-                <a:spcPts val="2380"/>
-              </a:lnSpc>
-              <a:buNone/>
-            </a:pPr>
             <a:r>
               <a:rPr lang="en-US" sz="1700" b="1" dirty="0">
                 <a:solidFill>
@@ -8173,12 +7954,6 @@
               </a:rPr>
               <a:t>＿</a:t>
             </a:r>
-            <a:pPr algn="l" indent="0" marL="0">
-              <a:lnSpc>
-                <a:spcPts val="2380"/>
-              </a:lnSpc>
-              <a:buNone/>
-            </a:pPr>
             <a:r>
               <a:rPr lang="en-US" sz="1700" dirty="0">
                 <a:solidFill>
@@ -8869,12 +8644,6 @@
               </a:rPr>
               <a:t>下一课，我们要用今天学的设施词汇玩</a:t>
             </a:r>
-            <a:pPr algn="ctr" indent="0" marL="0">
-              <a:lnSpc>
-                <a:spcPts val="2015"/>
-              </a:lnSpc>
-              <a:buNone/>
-            </a:pPr>
             <a:r>
               <a:rPr lang="en-US" sz="1300" b="1" dirty="0">
                 <a:solidFill>
@@ -8886,12 +8655,6 @@
               </a:rPr>
               <a:t>组词游戏</a:t>
             </a:r>
-            <a:pPr algn="ctr" indent="0" marL="0">
-              <a:lnSpc>
-                <a:spcPts val="2015"/>
-              </a:lnSpc>
-              <a:buNone/>
-            </a:pPr>
             <a:r>
               <a:rPr lang="en-US" sz="1300" dirty="0">
                 <a:solidFill>
@@ -8903,12 +8666,6 @@
               </a:rPr>
               <a:t>，还要看</a:t>
             </a:r>
-            <a:pPr algn="ctr" indent="0" marL="0">
-              <a:lnSpc>
-                <a:spcPts val="2015"/>
-              </a:lnSpc>
-              <a:buNone/>
-            </a:pPr>
             <a:r>
               <a:rPr lang="en-US" sz="1300" b="1" dirty="0">
                 <a:solidFill>
@@ -8920,12 +8677,6 @@
               </a:rPr>
               <a:t>学校地图</a:t>
             </a:r>
-            <a:pPr algn="ctr" indent="0" marL="0">
-              <a:lnSpc>
-                <a:spcPts val="2015"/>
-              </a:lnSpc>
-              <a:buNone/>
-            </a:pPr>
             <a:r>
               <a:rPr lang="en-US" sz="1300" dirty="0">
                 <a:solidFill>
@@ -10536,12 +10287,6 @@
               </a:rPr>
               <a:t>Project numerals 1–20 in a </a:t>
             </a:r>
-            <a:pPr algn="l" indent="0" marL="0">
-              <a:lnSpc>
-                <a:spcPts val="1400"/>
-              </a:lnSpc>
-              <a:buNone/>
-            </a:pPr>
             <a:r>
               <a:rPr lang="en-US" sz="1000" b="1" dirty="0">
                 <a:solidFill>
@@ -10553,12 +10298,6 @@
               </a:rPr>
               <a:t>scrambled grid</a:t>
             </a:r>
-            <a:pPr algn="l" indent="0" marL="0">
-              <a:lnSpc>
-                <a:spcPts val="1400"/>
-              </a:lnSpc>
-              <a:buNone/>
-            </a:pPr>
             <a:r>
               <a:rPr lang="en-US" sz="1000" dirty="0">
                 <a:solidFill>
@@ -10800,12 +10539,6 @@
               </a:rPr>
               <a:t>Cold call one student to fill the blank ("门!"). Class echoes: </a:t>
             </a:r>
-            <a:pPr algn="l" indent="0" marL="0">
-              <a:lnSpc>
-                <a:spcPts val="1400"/>
-              </a:lnSpc>
-              <a:buNone/>
-            </a:pPr>
             <a:r>
               <a:rPr lang="en-US" sz="1000" b="1" dirty="0">
                 <a:solidFill>
@@ -11257,12 +10990,6 @@
               </a:rPr>
               <a:t>科目用</a:t>
             </a:r>
-            <a:pPr algn="l" indent="0" marL="0">
-              <a:lnSpc>
-                <a:spcPts val="1680"/>
-              </a:lnSpc>
-              <a:buNone/>
-            </a:pPr>
             <a:r>
               <a:rPr lang="en-US" sz="1200" b="1" dirty="0">
                 <a:solidFill>
@@ -11274,12 +11001,6 @@
               </a:rPr>
               <a:t>"门"</a:t>
             </a:r>
-            <a:pPr algn="l" indent="0" marL="0">
-              <a:lnSpc>
-                <a:spcPts val="1680"/>
-              </a:lnSpc>
-              <a:buNone/>
-            </a:pPr>
             <a:r>
               <a:rPr lang="en-US" sz="1200" dirty="0">
                 <a:solidFill>
@@ -11291,12 +11012,6 @@
               </a:rPr>
               <a:t>数——一门课，两门课。但是今天我们不谈科目了，我们要谈</a:t>
             </a:r>
-            <a:pPr algn="l" indent="0" marL="0">
-              <a:lnSpc>
-                <a:spcPts val="1680"/>
-              </a:lnSpc>
-              <a:buNone/>
-            </a:pPr>
             <a:r>
               <a:rPr lang="en-US" sz="1200" b="1" dirty="0">
                 <a:solidFill>
@@ -11308,12 +11023,6 @@
               </a:rPr>
               <a:t>学校本身</a:t>
             </a:r>
-            <a:pPr algn="l" indent="0" marL="0">
-              <a:lnSpc>
-                <a:spcPts val="1680"/>
-              </a:lnSpc>
-              <a:buNone/>
-            </a:pPr>
             <a:r>
               <a:rPr lang="en-US" sz="1200" dirty="0">
                 <a:solidFill>
@@ -11325,12 +11034,6 @@
               </a:rPr>
               <a:t>。学校的建筑物用什么量词呢？今天你们会学到</a:t>
             </a:r>
-            <a:pPr algn="l" indent="0" marL="0">
-              <a:lnSpc>
-                <a:spcPts val="1680"/>
-              </a:lnSpc>
-              <a:buNone/>
-            </a:pPr>
             <a:r>
               <a:rPr lang="en-US" sz="1200" b="1" dirty="0">
                 <a:solidFill>
@@ -11342,12 +11045,6 @@
               </a:rPr>
               <a:t>两个新的量词</a:t>
             </a:r>
-            <a:pPr algn="l" indent="0" marL="0">
-              <a:lnSpc>
-                <a:spcPts val="1680"/>
-              </a:lnSpc>
-              <a:buNone/>
-            </a:pPr>
             <a:r>
               <a:rPr lang="en-US" sz="1200" dirty="0">
                 <a:solidFill>
@@ -11832,12 +11529,6 @@
               </a:rPr>
               <a:t>We are learning to </a:t>
             </a:r>
-            <a:pPr algn="l" indent="0" marL="0">
-              <a:lnSpc>
-                <a:spcPts val="2100"/>
-              </a:lnSpc>
-              <a:buNone/>
-            </a:pPr>
             <a:r>
               <a:rPr lang="en-US" sz="1500" b="1" dirty="0">
                 <a:solidFill>
@@ -11849,12 +11540,6 @@
               </a:rPr>
               <a:t>name school facilities</a:t>
             </a:r>
-            <a:pPr algn="l" indent="0" marL="0">
-              <a:lnSpc>
-                <a:spcPts val="2100"/>
-              </a:lnSpc>
-              <a:buNone/>
-            </a:pPr>
             <a:r>
               <a:rPr lang="en-US" sz="1500" dirty="0">
                 <a:solidFill>
@@ -11866,12 +11551,6 @@
               </a:rPr>
               <a:t> in Chinese and introduce our school using </a:t>
             </a:r>
-            <a:pPr algn="l" indent="0" marL="0">
-              <a:lnSpc>
-                <a:spcPts val="2100"/>
-              </a:lnSpc>
-              <a:buNone/>
-            </a:pPr>
             <a:r>
               <a:rPr lang="en-US" sz="1500" b="1" dirty="0">
                 <a:solidFill>
@@ -12032,12 +11711,6 @@
               </a:rPr>
               <a:t>I can name </a:t>
             </a:r>
-            <a:pPr algn="l" indent="0" marL="0">
-              <a:lnSpc>
-                <a:spcPts val="1680"/>
-              </a:lnSpc>
-              <a:buNone/>
-            </a:pPr>
             <a:r>
               <a:rPr lang="en-US" sz="1200" b="1" dirty="0">
                 <a:solidFill>
@@ -12049,12 +11722,6 @@
               </a:rPr>
               <a:t>at least eight school facilities</a:t>
             </a:r>
-            <a:pPr algn="l" indent="0" marL="0">
-              <a:lnSpc>
-                <a:spcPts val="1680"/>
-              </a:lnSpc>
-              <a:buNone/>
-            </a:pPr>
             <a:r>
               <a:rPr lang="en-US" sz="1200" dirty="0">
                 <a:solidFill>
@@ -12254,12 +11921,6 @@
               </a:rPr>
               <a:t>I can use the correct measure word for buildings and facilities — </a:t>
             </a:r>
-            <a:pPr algn="l" indent="0" marL="0">
-              <a:lnSpc>
-                <a:spcPts val="1680"/>
-              </a:lnSpc>
-              <a:buNone/>
-            </a:pPr>
             <a:r>
               <a:rPr lang="en-US" sz="1200" b="1" dirty="0">
                 <a:solidFill>
@@ -12271,12 +11932,6 @@
               </a:rPr>
               <a:t>个</a:t>
             </a:r>
-            <a:pPr algn="l" indent="0" marL="0">
-              <a:lnSpc>
-                <a:spcPts val="1680"/>
-              </a:lnSpc>
-              <a:buNone/>
-            </a:pPr>
             <a:r>
               <a:rPr lang="en-US" sz="1200" dirty="0">
                 <a:solidFill>
@@ -12288,12 +11943,6 @@
               </a:rPr>
               <a:t> for most facilities, </a:t>
             </a:r>
-            <a:pPr algn="l" indent="0" marL="0">
-              <a:lnSpc>
-                <a:spcPts val="1680"/>
-              </a:lnSpc>
-              <a:buNone/>
-            </a:pPr>
             <a:r>
               <a:rPr lang="en-US" sz="1200" b="1" dirty="0">
                 <a:solidFill>
@@ -12305,12 +11954,6 @@
               </a:rPr>
               <a:t>幢</a:t>
             </a:r>
-            <a:pPr algn="l" indent="0" marL="0">
-              <a:lnSpc>
-                <a:spcPts val="1680"/>
-              </a:lnSpc>
-              <a:buNone/>
-            </a:pPr>
             <a:r>
               <a:rPr lang="en-US" sz="1200" dirty="0">
                 <a:solidFill>
@@ -12510,12 +12153,6 @@
               </a:rPr>
               <a:t>I can introduce my school in a complete sentence using </a:t>
             </a:r>
-            <a:pPr algn="l" indent="0" marL="0">
-              <a:lnSpc>
-                <a:spcPts val="1680"/>
-              </a:lnSpc>
-              <a:buNone/>
-            </a:pPr>
             <a:r>
               <a:rPr lang="en-US" sz="1200" b="1" dirty="0">
                 <a:solidFill>
@@ -14878,12 +14515,6 @@
               </a:rPr>
               <a:t>💡 Pronunciation tip:</a:t>
             </a:r>
-            <a:pPr algn="l" indent="0" marL="0">
-              <a:lnSpc>
-                <a:spcPts val="1330"/>
-              </a:lnSpc>
-              <a:buNone/>
-            </a:pPr>
             <a:r>
               <a:rPr lang="en-US" sz="950" dirty="0">
                 <a:solidFill>
@@ -14969,12 +14600,6 @@
               </a:rPr>
               <a:t>字形小知识 · Component breakdown:</a:t>
             </a:r>
-            <a:pPr algn="l" indent="0" marL="0">
-              <a:lnSpc>
-                <a:spcPts val="1330"/>
-              </a:lnSpc>
-              <a:buNone/>
-            </a:pPr>
             <a:r>
               <a:rPr lang="en-US" sz="950" dirty="0">
                 <a:solidFill>
@@ -14986,12 +14611,6 @@
               </a:rPr>
               <a:t> </a:t>
             </a:r>
-            <a:pPr algn="l" indent="0" marL="0">
-              <a:lnSpc>
-                <a:spcPts val="1330"/>
-              </a:lnSpc>
-              <a:buNone/>
-            </a:pPr>
             <a:r>
               <a:rPr lang="en-US" sz="950" b="1" dirty="0">
                 <a:solidFill>
@@ -15003,12 +14622,6 @@
               </a:rPr>
               <a:t>介</a:t>
             </a:r>
-            <a:pPr algn="l" indent="0" marL="0">
-              <a:lnSpc>
-                <a:spcPts val="1330"/>
-              </a:lnSpc>
-              <a:buNone/>
-            </a:pPr>
             <a:r>
               <a:rPr lang="en-US" sz="950" dirty="0">
                 <a:solidFill>
@@ -15020,12 +14633,6 @@
               </a:rPr>
               <a:t>(mediate)+</a:t>
             </a:r>
-            <a:pPr algn="l" indent="0" marL="0">
-              <a:lnSpc>
-                <a:spcPts val="1330"/>
-              </a:lnSpc>
-              <a:buNone/>
-            </a:pPr>
             <a:r>
               <a:rPr lang="en-US" sz="950" b="1" dirty="0">
                 <a:solidFill>
@@ -15037,12 +14644,6 @@
               </a:rPr>
               <a:t>绍</a:t>
             </a:r>
-            <a:pPr algn="l" indent="0" marL="0">
-              <a:lnSpc>
-                <a:spcPts val="1330"/>
-              </a:lnSpc>
-              <a:buNone/>
-            </a:pPr>
             <a:r>
               <a:rPr lang="en-US" sz="950" dirty="0">
                 <a:solidFill>
@@ -15054,12 +14655,6 @@
               </a:rPr>
               <a:t>(carry on)=介绍 "introduce" · </a:t>
             </a:r>
-            <a:pPr algn="l" indent="0" marL="0">
-              <a:lnSpc>
-                <a:spcPts val="1330"/>
-              </a:lnSpc>
-              <a:buNone/>
-            </a:pPr>
             <a:r>
               <a:rPr lang="en-US" sz="950" b="1" dirty="0">
                 <a:solidFill>
@@ -15071,12 +14666,6 @@
               </a:rPr>
               <a:t>图</a:t>
             </a:r>
-            <a:pPr algn="l" indent="0" marL="0">
-              <a:lnSpc>
-                <a:spcPts val="1330"/>
-              </a:lnSpc>
-              <a:buNone/>
-            </a:pPr>
             <a:r>
               <a:rPr lang="en-US" sz="950" dirty="0">
                 <a:solidFill>
@@ -15088,12 +14677,6 @@
               </a:rPr>
               <a:t>(picture)+</a:t>
             </a:r>
-            <a:pPr algn="l" indent="0" marL="0">
-              <a:lnSpc>
-                <a:spcPts val="1330"/>
-              </a:lnSpc>
-              <a:buNone/>
-            </a:pPr>
             <a:r>
               <a:rPr lang="en-US" sz="950" b="1" dirty="0">
                 <a:solidFill>
@@ -15105,12 +14688,6 @@
               </a:rPr>
               <a:t>书</a:t>
             </a:r>
-            <a:pPr algn="l" indent="0" marL="0">
-              <a:lnSpc>
-                <a:spcPts val="1330"/>
-              </a:lnSpc>
-              <a:buNone/>
-            </a:pPr>
             <a:r>
               <a:rPr lang="en-US" sz="950" dirty="0">
                 <a:solidFill>
@@ -15122,12 +14699,6 @@
               </a:rPr>
               <a:t>(book)+</a:t>
             </a:r>
-            <a:pPr algn="l" indent="0" marL="0">
-              <a:lnSpc>
-                <a:spcPts val="1330"/>
-              </a:lnSpc>
-              <a:buNone/>
-            </a:pPr>
             <a:r>
               <a:rPr lang="en-US" sz="950" b="1" dirty="0">
                 <a:solidFill>
@@ -15139,12 +14710,6 @@
               </a:rPr>
               <a:t>馆</a:t>
             </a:r>
-            <a:pPr algn="l" indent="0" marL="0">
-              <a:lnSpc>
-                <a:spcPts val="1330"/>
-              </a:lnSpc>
-              <a:buNone/>
-            </a:pPr>
             <a:r>
               <a:rPr lang="en-US" sz="950" dirty="0">
                 <a:solidFill>
@@ -15156,12 +14721,6 @@
               </a:rPr>
               <a:t>(hall)=图书馆 "library" · </a:t>
             </a:r>
-            <a:pPr algn="l" indent="0" marL="0">
-              <a:lnSpc>
-                <a:spcPts val="1330"/>
-              </a:lnSpc>
-              <a:buNone/>
-            </a:pPr>
             <a:r>
               <a:rPr lang="en-US" sz="950" b="1" dirty="0">
                 <a:solidFill>
@@ -15173,12 +14732,6 @@
               </a:rPr>
               <a:t>礼</a:t>
             </a:r>
-            <a:pPr algn="l" indent="0" marL="0">
-              <a:lnSpc>
-                <a:spcPts val="1330"/>
-              </a:lnSpc>
-              <a:buNone/>
-            </a:pPr>
             <a:r>
               <a:rPr lang="en-US" sz="950" dirty="0">
                 <a:solidFill>
@@ -15190,12 +14743,6 @@
               </a:rPr>
               <a:t>(ceremony)+</a:t>
             </a:r>
-            <a:pPr algn="l" indent="0" marL="0">
-              <a:lnSpc>
-                <a:spcPts val="1330"/>
-              </a:lnSpc>
-              <a:buNone/>
-            </a:pPr>
             <a:r>
               <a:rPr lang="en-US" sz="950" b="1" dirty="0">
                 <a:solidFill>
@@ -15207,12 +14754,6 @@
               </a:rPr>
               <a:t>堂</a:t>
             </a:r>
-            <a:pPr algn="l" indent="0" marL="0">
-              <a:lnSpc>
-                <a:spcPts val="1330"/>
-              </a:lnSpc>
-              <a:buNone/>
-            </a:pPr>
             <a:r>
               <a:rPr lang="en-US" sz="950" dirty="0">
                 <a:solidFill>
@@ -15224,12 +14765,6 @@
               </a:rPr>
               <a:t>(hall)=礼堂 "auditorium" · </a:t>
             </a:r>
-            <a:pPr algn="l" indent="0" marL="0">
-              <a:lnSpc>
-                <a:spcPts val="1330"/>
-              </a:lnSpc>
-              <a:buNone/>
-            </a:pPr>
             <a:r>
               <a:rPr lang="en-US" sz="950" b="1" dirty="0">
                 <a:solidFill>
@@ -15241,12 +14776,6 @@
               </a:rPr>
               <a:t>操</a:t>
             </a:r>
-            <a:pPr algn="l" indent="0" marL="0">
-              <a:lnSpc>
-                <a:spcPts val="1330"/>
-              </a:lnSpc>
-              <a:buNone/>
-            </a:pPr>
             <a:r>
               <a:rPr lang="en-US" sz="950" dirty="0">
                 <a:solidFill>
@@ -15258,12 +14787,6 @@
               </a:rPr>
               <a:t>(exercise)+</a:t>
             </a:r>
-            <a:pPr algn="l" indent="0" marL="0">
-              <a:lnSpc>
-                <a:spcPts val="1330"/>
-              </a:lnSpc>
-              <a:buNone/>
-            </a:pPr>
             <a:r>
               <a:rPr lang="en-US" sz="950" b="1" dirty="0">
                 <a:solidFill>
@@ -15275,12 +14798,6 @@
               </a:rPr>
               <a:t>场</a:t>
             </a:r>
-            <a:pPr algn="l" indent="0" marL="0">
-              <a:lnSpc>
-                <a:spcPts val="1330"/>
-              </a:lnSpc>
-              <a:buNone/>
-            </a:pPr>
             <a:r>
               <a:rPr lang="en-US" sz="950" dirty="0">
                 <a:solidFill>
@@ -15292,12 +14809,6 @@
               </a:rPr>
               <a:t>(field)=操场 "sports field" · </a:t>
             </a:r>
-            <a:pPr algn="l" indent="0" marL="0">
-              <a:lnSpc>
-                <a:spcPts val="1330"/>
-              </a:lnSpc>
-              <a:buNone/>
-            </a:pPr>
             <a:r>
               <a:rPr lang="en-US" sz="950" b="1" dirty="0">
                 <a:solidFill>
@@ -15309,12 +14820,6 @@
               </a:rPr>
               <a:t>游泳</a:t>
             </a:r>
-            <a:pPr algn="l" indent="0" marL="0">
-              <a:lnSpc>
-                <a:spcPts val="1330"/>
-              </a:lnSpc>
-              <a:buNone/>
-            </a:pPr>
             <a:r>
               <a:rPr lang="en-US" sz="950" dirty="0">
                 <a:solidFill>
@@ -15326,12 +14831,6 @@
               </a:rPr>
               <a:t>(swim)+</a:t>
             </a:r>
-            <a:pPr algn="l" indent="0" marL="0">
-              <a:lnSpc>
-                <a:spcPts val="1330"/>
-              </a:lnSpc>
-              <a:buNone/>
-            </a:pPr>
             <a:r>
               <a:rPr lang="en-US" sz="950" b="1" dirty="0">
                 <a:solidFill>
@@ -15343,12 +14842,6 @@
               </a:rPr>
               <a:t>池</a:t>
             </a:r>
-            <a:pPr algn="l" indent="0" marL="0">
-              <a:lnSpc>
-                <a:spcPts val="1330"/>
-              </a:lnSpc>
-              <a:buNone/>
-            </a:pPr>
             <a:r>
               <a:rPr lang="en-US" sz="950" dirty="0">
                 <a:solidFill>
@@ -15855,12 +15348,6 @@
               </a:rPr>
               <a:t>default for most rooms/facilities: 一</a:t>
             </a:r>
-            <a:pPr algn="l" indent="0" marL="0">
-              <a:lnSpc>
-                <a:spcPts val="1470"/>
-              </a:lnSpc>
-              <a:buNone/>
-            </a:pPr>
             <a:r>
               <a:rPr lang="en-US" sz="1050" b="1" dirty="0">
                 <a:solidFill>
@@ -15872,12 +15359,6 @@
               </a:rPr>
               <a:t>个</a:t>
             </a:r>
-            <a:pPr algn="l" indent="0" marL="0">
-              <a:lnSpc>
-                <a:spcPts val="1470"/>
-              </a:lnSpc>
-              <a:buNone/>
-            </a:pPr>
             <a:r>
               <a:rPr lang="en-US" sz="1050" dirty="0">
                 <a:solidFill>
@@ -15889,12 +15370,6 @@
               </a:rPr>
               <a:t>图书馆, 一</a:t>
             </a:r>
-            <a:pPr algn="l" indent="0" marL="0">
-              <a:lnSpc>
-                <a:spcPts val="1470"/>
-              </a:lnSpc>
-              <a:buNone/>
-            </a:pPr>
             <a:r>
               <a:rPr lang="en-US" sz="1050" b="1" dirty="0">
                 <a:solidFill>
@@ -15906,12 +15381,6 @@
               </a:rPr>
               <a:t>个</a:t>
             </a:r>
-            <a:pPr algn="l" indent="0" marL="0">
-              <a:lnSpc>
-                <a:spcPts val="1470"/>
-              </a:lnSpc>
-              <a:buNone/>
-            </a:pPr>
             <a:r>
               <a:rPr lang="en-US" sz="1050" dirty="0">
                 <a:solidFill>
@@ -16082,12 +15551,6 @@
               </a:rPr>
               <a:t>whole buildings/blocks: 五</a:t>
             </a:r>
-            <a:pPr algn="l" indent="0" marL="0">
-              <a:lnSpc>
-                <a:spcPts val="1470"/>
-              </a:lnSpc>
-              <a:buNone/>
-            </a:pPr>
             <a:r>
               <a:rPr lang="en-US" sz="1050" b="1" dirty="0">
                 <a:solidFill>
@@ -16099,12 +15562,6 @@
               </a:rPr>
               <a:t>幢</a:t>
             </a:r>
-            <a:pPr algn="l" indent="0" marL="0">
-              <a:lnSpc>
-                <a:spcPts val="1470"/>
-              </a:lnSpc>
-              <a:buNone/>
-            </a:pPr>
             <a:r>
               <a:rPr lang="en-US" sz="1050" dirty="0">
                 <a:solidFill>
@@ -16236,12 +15693,6 @@
               </a:rPr>
               <a:t>数整栋楼用"幢"，其他的大部分用"个"。</a:t>
             </a:r>
-            <a:pPr algn="l" indent="0" marL="0">
-              <a:lnSpc>
-                <a:spcPts val="1813"/>
-              </a:lnSpc>
-              <a:buNone/>
-            </a:pPr>
             <a:r>
               <a:rPr lang="en-US" sz="1250" dirty="0">
                 <a:solidFill>
@@ -16529,12 +15980,6 @@
               </a:rPr>
               <a:t>篮球场/足球场/操场/停车场 already include 场 — always 一</a:t>
             </a:r>
-            <a:pPr algn="l" indent="0" marL="0">
-              <a:lnSpc>
-                <a:spcPts val="1540"/>
-              </a:lnSpc>
-              <a:buNone/>
-            </a:pPr>
             <a:r>
               <a:rPr lang="en-US" sz="1100" b="1" dirty="0">
                 <a:solidFill>
@@ -16546,12 +15991,6 @@
               </a:rPr>
               <a:t>个</a:t>
             </a:r>
-            <a:pPr algn="l" indent="0" marL="0">
-              <a:lnSpc>
-                <a:spcPts val="1540"/>
-              </a:lnSpc>
-              <a:buNone/>
-            </a:pPr>
             <a:r>
               <a:rPr lang="en-US" sz="1100" dirty="0">
                 <a:solidFill>
@@ -17036,12 +16475,6 @@
               </a:rPr>
               <a:t>我来介绍一下我们学校。我们学校有</a:t>
             </a:r>
-            <a:pPr algn="l" indent="0" marL="0">
-              <a:lnSpc>
-                <a:spcPts val="2850"/>
-              </a:lnSpc>
-              <a:buNone/>
-            </a:pPr>
             <a:r>
               <a:rPr lang="en-US" sz="1900" b="1" dirty="0">
                 <a:solidFill>
@@ -17053,12 +16486,6 @@
               </a:rPr>
               <a:t>＿＿＿</a:t>
             </a:r>
-            <a:pPr algn="l" indent="0" marL="0">
-              <a:lnSpc>
-                <a:spcPts val="2850"/>
-              </a:lnSpc>
-              <a:buNone/>
-            </a:pPr>
             <a:r>
               <a:rPr lang="en-US" sz="1900" dirty="0">
                 <a:solidFill>
@@ -17070,12 +16497,6 @@
               </a:rPr>
               <a:t>、</a:t>
             </a:r>
-            <a:pPr algn="l" indent="0" marL="0">
-              <a:lnSpc>
-                <a:spcPts val="2850"/>
-              </a:lnSpc>
-              <a:buNone/>
-            </a:pPr>
             <a:r>
               <a:rPr lang="en-US" sz="1900" b="1" dirty="0">
                 <a:solidFill>
@@ -17087,12 +16508,6 @@
               </a:rPr>
               <a:t>＿＿＿</a:t>
             </a:r>
-            <a:pPr algn="l" indent="0" marL="0">
-              <a:lnSpc>
-                <a:spcPts val="2850"/>
-              </a:lnSpc>
-              <a:buNone/>
-            </a:pPr>
             <a:r>
               <a:rPr lang="en-US" sz="1900" dirty="0">
                 <a:solidFill>
@@ -17104,12 +16519,6 @@
               </a:rPr>
               <a:t>……和</a:t>
             </a:r>
-            <a:pPr algn="l" indent="0" marL="0">
-              <a:lnSpc>
-                <a:spcPts val="2850"/>
-              </a:lnSpc>
-              <a:buNone/>
-            </a:pPr>
             <a:r>
               <a:rPr lang="en-US" sz="1900" b="1" dirty="0">
                 <a:solidFill>
@@ -17121,12 +16530,6 @@
               </a:rPr>
               <a:t>＿＿＿</a:t>
             </a:r>
-            <a:pPr algn="l" indent="0" marL="0">
-              <a:lnSpc>
-                <a:spcPts val="2850"/>
-              </a:lnSpc>
-              <a:buNone/>
-            </a:pPr>
             <a:r>
               <a:rPr lang="en-US" sz="1900" dirty="0">
                 <a:solidFill>
@@ -17297,12 +16700,6 @@
               </a:rPr>
               <a:t>我来介绍一下我们学校。我们学校有</a:t>
             </a:r>
-            <a:pPr algn="l" indent="0" marL="0">
-              <a:lnSpc>
-                <a:spcPts val="1960"/>
-              </a:lnSpc>
-              <a:buNone/>
-            </a:pPr>
             <a:r>
               <a:rPr lang="en-US" sz="1400" b="1" dirty="0">
                 <a:solidFill>
@@ -17314,12 +16711,6 @@
               </a:rPr>
               <a:t>五</a:t>
             </a:r>
-            <a:pPr algn="l" indent="0" marL="0">
-              <a:lnSpc>
-                <a:spcPts val="1960"/>
-              </a:lnSpc>
-              <a:buNone/>
-            </a:pPr>
             <a:r>
               <a:rPr lang="en-US" sz="1400" b="1" dirty="0">
                 <a:solidFill>
@@ -17331,12 +16722,6 @@
               </a:rPr>
               <a:t>幢</a:t>
             </a:r>
-            <a:pPr algn="l" indent="0" marL="0">
-              <a:lnSpc>
-                <a:spcPts val="1960"/>
-              </a:lnSpc>
-              <a:buNone/>
-            </a:pPr>
             <a:r>
               <a:rPr lang="en-US" sz="1400" dirty="0">
                 <a:solidFill>
@@ -17348,12 +16733,6 @@
               </a:rPr>
               <a:t>教学楼、</a:t>
             </a:r>
-            <a:pPr algn="l" indent="0" marL="0">
-              <a:lnSpc>
-                <a:spcPts val="1960"/>
-              </a:lnSpc>
-              <a:buNone/>
-            </a:pPr>
             <a:r>
               <a:rPr lang="en-US" sz="1400" b="1" dirty="0">
                 <a:solidFill>
@@ -17365,12 +16744,6 @@
               </a:rPr>
               <a:t>一</a:t>
             </a:r>
-            <a:pPr algn="l" indent="0" marL="0">
-              <a:lnSpc>
-                <a:spcPts val="1960"/>
-              </a:lnSpc>
-              <a:buNone/>
-            </a:pPr>
             <a:r>
               <a:rPr lang="en-US" sz="1400" b="1" dirty="0">
                 <a:solidFill>
@@ -17382,12 +16755,6 @@
               </a:rPr>
               <a:t>个</a:t>
             </a:r>
-            <a:pPr algn="l" indent="0" marL="0">
-              <a:lnSpc>
-                <a:spcPts val="1960"/>
-              </a:lnSpc>
-              <a:buNone/>
-            </a:pPr>
             <a:r>
               <a:rPr lang="en-US" sz="1400" dirty="0">
                 <a:solidFill>
@@ -17399,12 +16766,6 @@
               </a:rPr>
               <a:t>图书馆、</a:t>
             </a:r>
-            <a:pPr algn="l" indent="0" marL="0">
-              <a:lnSpc>
-                <a:spcPts val="1960"/>
-              </a:lnSpc>
-              <a:buNone/>
-            </a:pPr>
             <a:r>
               <a:rPr lang="en-US" sz="1400" b="1" dirty="0">
                 <a:solidFill>
@@ -17416,12 +16777,6 @@
               </a:rPr>
               <a:t>一</a:t>
             </a:r>
-            <a:pPr algn="l" indent="0" marL="0">
-              <a:lnSpc>
-                <a:spcPts val="1960"/>
-              </a:lnSpc>
-              <a:buNone/>
-            </a:pPr>
             <a:r>
               <a:rPr lang="en-US" sz="1400" b="1" dirty="0">
                 <a:solidFill>
@@ -17433,12 +16788,6 @@
               </a:rPr>
               <a:t>个</a:t>
             </a:r>
-            <a:pPr algn="l" indent="0" marL="0">
-              <a:lnSpc>
-                <a:spcPts val="1960"/>
-              </a:lnSpc>
-              <a:buNone/>
-            </a:pPr>
             <a:r>
               <a:rPr lang="en-US" sz="1400" dirty="0">
                 <a:solidFill>
@@ -17450,12 +16799,6 @@
               </a:rPr>
               <a:t>礼堂、</a:t>
             </a:r>
-            <a:pPr algn="l" indent="0" marL="0">
-              <a:lnSpc>
-                <a:spcPts val="1960"/>
-              </a:lnSpc>
-              <a:buNone/>
-            </a:pPr>
             <a:r>
               <a:rPr lang="en-US" sz="1400" b="1" dirty="0">
                 <a:solidFill>
@@ -17467,12 +16810,6 @@
               </a:rPr>
               <a:t>一</a:t>
             </a:r>
-            <a:pPr algn="l" indent="0" marL="0">
-              <a:lnSpc>
-                <a:spcPts val="1960"/>
-              </a:lnSpc>
-              <a:buNone/>
-            </a:pPr>
             <a:r>
               <a:rPr lang="en-US" sz="1400" b="1" dirty="0">
                 <a:solidFill>
@@ -17484,12 +16821,6 @@
               </a:rPr>
               <a:t>个</a:t>
             </a:r>
-            <a:pPr algn="l" indent="0" marL="0">
-              <a:lnSpc>
-                <a:spcPts val="1960"/>
-              </a:lnSpc>
-              <a:buNone/>
-            </a:pPr>
             <a:r>
               <a:rPr lang="en-US" sz="1400" dirty="0">
                 <a:solidFill>
@@ -17621,12 +16952,6 @@
               </a:rPr>
               <a:t>我们学校还有</a:t>
             </a:r>
-            <a:pPr algn="l" indent="0" marL="0">
-              <a:lnSpc>
-                <a:spcPts val="1960"/>
-              </a:lnSpc>
-              <a:buNone/>
-            </a:pPr>
             <a:r>
               <a:rPr lang="en-US" sz="1400" b="1" dirty="0">
                 <a:solidFill>
@@ -17638,12 +16963,6 @@
               </a:rPr>
               <a:t>一</a:t>
             </a:r>
-            <a:pPr algn="l" indent="0" marL="0">
-              <a:lnSpc>
-                <a:spcPts val="1960"/>
-              </a:lnSpc>
-              <a:buNone/>
-            </a:pPr>
             <a:r>
               <a:rPr lang="en-US" sz="1400" b="1" dirty="0">
                 <a:solidFill>
@@ -17655,12 +16974,6 @@
               </a:rPr>
               <a:t>个</a:t>
             </a:r>
-            <a:pPr algn="l" indent="0" marL="0">
-              <a:lnSpc>
-                <a:spcPts val="1960"/>
-              </a:lnSpc>
-              <a:buNone/>
-            </a:pPr>
             <a:r>
               <a:rPr lang="en-US" sz="1400" dirty="0">
                 <a:solidFill>
@@ -17672,12 +16985,6 @@
               </a:rPr>
               <a:t>餐厅、</a:t>
             </a:r>
-            <a:pPr algn="l" indent="0" marL="0">
-              <a:lnSpc>
-                <a:spcPts val="1960"/>
-              </a:lnSpc>
-              <a:buNone/>
-            </a:pPr>
             <a:r>
               <a:rPr lang="en-US" sz="1400" b="1" dirty="0">
                 <a:solidFill>
@@ -17689,12 +16996,6 @@
               </a:rPr>
               <a:t>一</a:t>
             </a:r>
-            <a:pPr algn="l" indent="0" marL="0">
-              <a:lnSpc>
-                <a:spcPts val="1960"/>
-              </a:lnSpc>
-              <a:buNone/>
-            </a:pPr>
             <a:r>
               <a:rPr lang="en-US" sz="1400" b="1" dirty="0">
                 <a:solidFill>
@@ -17706,12 +17007,6 @@
               </a:rPr>
               <a:t>个</a:t>
             </a:r>
-            <a:pPr algn="l" indent="0" marL="0">
-              <a:lnSpc>
-                <a:spcPts val="1960"/>
-              </a:lnSpc>
-              <a:buNone/>
-            </a:pPr>
             <a:r>
               <a:rPr lang="en-US" sz="1400" dirty="0">
                 <a:solidFill>
@@ -17723,12 +17018,6 @@
               </a:rPr>
               <a:t>游泳池和</a:t>
             </a:r>
-            <a:pPr algn="l" indent="0" marL="0">
-              <a:lnSpc>
-                <a:spcPts val="1960"/>
-              </a:lnSpc>
-              <a:buNone/>
-            </a:pPr>
             <a:r>
               <a:rPr lang="en-US" sz="1400" b="1" dirty="0">
                 <a:solidFill>
@@ -17740,12 +17029,6 @@
               </a:rPr>
               <a:t>一</a:t>
             </a:r>
-            <a:pPr algn="l" indent="0" marL="0">
-              <a:lnSpc>
-                <a:spcPts val="1960"/>
-              </a:lnSpc>
-              <a:buNone/>
-            </a:pPr>
             <a:r>
               <a:rPr lang="en-US" sz="1400" b="1" dirty="0">
                 <a:solidFill>
@@ -17757,12 +17040,6 @@
               </a:rPr>
               <a:t>个</a:t>
             </a:r>
-            <a:pPr algn="l" indent="0" marL="0">
-              <a:lnSpc>
-                <a:spcPts val="1960"/>
-              </a:lnSpc>
-              <a:buNone/>
-            </a:pPr>
             <a:r>
               <a:rPr lang="en-US" sz="1400" dirty="0">
                 <a:solidFill>
@@ -17894,12 +17171,6 @@
               </a:rPr>
               <a:t>我们学校有</a:t>
             </a:r>
-            <a:pPr algn="l" indent="0" marL="0">
-              <a:lnSpc>
-                <a:spcPts val="1960"/>
-              </a:lnSpc>
-              <a:buNone/>
-            </a:pPr>
             <a:r>
               <a:rPr lang="en-US" sz="1400" b="1" dirty="0">
                 <a:solidFill>
@@ -17911,12 +17182,6 @@
               </a:rPr>
               <a:t>一百</a:t>
             </a:r>
-            <a:pPr algn="l" indent="0" marL="0">
-              <a:lnSpc>
-                <a:spcPts val="1960"/>
-              </a:lnSpc>
-              <a:buNone/>
-            </a:pPr>
             <a:r>
               <a:rPr lang="en-US" sz="1400" b="1" dirty="0">
                 <a:solidFill>
@@ -17928,12 +17193,6 @@
               </a:rPr>
               <a:t>个</a:t>
             </a:r>
-            <a:pPr algn="l" indent="0" marL="0">
-              <a:lnSpc>
-                <a:spcPts val="1960"/>
-              </a:lnSpc>
-              <a:buNone/>
-            </a:pPr>
             <a:r>
               <a:rPr lang="en-US" sz="1400" dirty="0">
                 <a:solidFill>
@@ -18508,12 +17767,6 @@
               </a:rPr>
               <a:t>Teacher projects </a:t>
             </a:r>
-            <a:pPr algn="l" indent="0" marL="0">
-              <a:lnSpc>
-                <a:spcPts val="1523"/>
-              </a:lnSpc>
-              <a:buNone/>
-            </a:pPr>
             <a:r>
               <a:rPr lang="en-US" sz="1050" b="1" dirty="0">
                 <a:solidFill>
@@ -18525,12 +17778,6 @@
               </a:rPr>
               <a:t>"五幢教学楼"</a:t>
             </a:r>
-            <a:pPr algn="l" indent="0" marL="0">
-              <a:lnSpc>
-                <a:spcPts val="1523"/>
-              </a:lnSpc>
-              <a:buNone/>
-            </a:pPr>
             <a:r>
               <a:rPr lang="en-US" sz="1050" dirty="0">
                 <a:solidFill>
@@ -18542,12 +17789,6 @@
               </a:rPr>
               <a:t> and </a:t>
             </a:r>
-            <a:pPr algn="l" indent="0" marL="0">
-              <a:lnSpc>
-                <a:spcPts val="1523"/>
-              </a:lnSpc>
-              <a:buNone/>
-            </a:pPr>
             <a:r>
               <a:rPr lang="en-US" sz="1050" b="1" dirty="0">
                 <a:solidFill>
@@ -18559,12 +17800,6 @@
               </a:rPr>
               <a:t>"五个教学楼"</a:t>
             </a:r>
-            <a:pPr algn="l" indent="0" marL="0">
-              <a:lnSpc>
-                <a:spcPts val="1523"/>
-              </a:lnSpc>
-              <a:buNone/>
-            </a:pPr>
             <a:r>
               <a:rPr lang="en-US" sz="1050" dirty="0">
                 <a:solidFill>
@@ -18803,12 +18038,6 @@
               </a:rPr>
               <a:t>Teacher asks individual students, in order: "Alex，</a:t>
             </a:r>
-            <a:pPr algn="l" indent="0" marL="0">
-              <a:lnSpc>
-                <a:spcPts val="1523"/>
-              </a:lnSpc>
-              <a:buNone/>
-            </a:pPr>
             <a:r>
               <a:rPr lang="en-US" sz="1050" b="1" dirty="0">
                 <a:solidFill>
@@ -18820,12 +18049,6 @@
               </a:rPr>
               <a:t>'library'</a:t>
             </a:r>
-            <a:pPr algn="l" indent="0" marL="0">
-              <a:lnSpc>
-                <a:spcPts val="1523"/>
-              </a:lnSpc>
-              <a:buNone/>
-            </a:pPr>
             <a:r>
               <a:rPr lang="en-US" sz="1050" dirty="0">
                 <a:solidFill>
@@ -18837,12 +18060,6 @@
               </a:rPr>
               <a:t> 用中文怎么说？" "Priya，</a:t>
             </a:r>
-            <a:pPr algn="l" indent="0" marL="0">
-              <a:lnSpc>
-                <a:spcPts val="1523"/>
-              </a:lnSpc>
-              <a:buNone/>
-            </a:pPr>
             <a:r>
               <a:rPr lang="en-US" sz="1050" b="1" dirty="0">
                 <a:solidFill>
@@ -18854,12 +18071,6 @@
               </a:rPr>
               <a:t>'swimming pool'</a:t>
             </a:r>
-            <a:pPr algn="l" indent="0" marL="0">
-              <a:lnSpc>
-                <a:spcPts val="1523"/>
-              </a:lnSpc>
-              <a:buNone/>
-            </a:pPr>
             <a:r>
               <a:rPr lang="en-US" sz="1050" dirty="0">
                 <a:solidFill>
@@ -18871,12 +18082,6 @@
               </a:rPr>
               <a:t> 呢？" "Sam，</a:t>
             </a:r>
-            <a:pPr algn="l" indent="0" marL="0">
-              <a:lnSpc>
-                <a:spcPts val="1523"/>
-              </a:lnSpc>
-              <a:buNone/>
-            </a:pPr>
             <a:r>
               <a:rPr lang="en-US" sz="1050" b="1" dirty="0">
                 <a:solidFill>
@@ -18888,12 +18093,6 @@
               </a:rPr>
               <a:t>'car park'</a:t>
             </a:r>
-            <a:pPr algn="l" indent="0" marL="0">
-              <a:lnSpc>
-                <a:spcPts val="1523"/>
-              </a:lnSpc>
-              <a:buNone/>
-            </a:pPr>
             <a:r>
               <a:rPr lang="en-US" sz="1050" dirty="0">
                 <a:solidFill>
@@ -19370,12 +18569,6 @@
               </a:rPr>
               <a:t>Teacher note:</a:t>
             </a:r>
-            <a:pPr algn="l" indent="0" marL="0">
-              <a:lnSpc>
-                <a:spcPts val="1470"/>
-              </a:lnSpc>
-              <a:buNone/>
-            </a:pPr>
             <a:r>
               <a:rPr lang="en-US" sz="1050" dirty="0">
                 <a:solidFill>
@@ -19869,9 +19062,6 @@
               </a:rPr>
               <a:t>Choral Error Correction — spot the mistake in: </a:t>
             </a:r>
-            <a:pPr algn="l" indent="0" marL="0">
-              <a:buNone/>
-            </a:pPr>
             <a:r>
               <a:rPr lang="en-US" sz="1200" dirty="0">
                 <a:solidFill>
@@ -19958,9 +19148,6 @@
               </a:rPr>
               <a:t>✅ 我们学校有一</a:t>
             </a:r>
-            <a:pPr algn="l" indent="0" marL="0">
-              <a:buNone/>
-            </a:pPr>
             <a:r>
               <a:rPr lang="en-US" sz="2200" b="1" u="sng" dirty="0">
                 <a:solidFill>
@@ -19972,9 +19159,6 @@
               </a:rPr>
               <a:t>幢</a:t>
             </a:r>
-            <a:pPr algn="l" indent="0" marL="0">
-              <a:buNone/>
-            </a:pPr>
             <a:r>
               <a:rPr lang="en-US" sz="2200" dirty="0">
                 <a:solidFill>
@@ -20028,12 +19212,6 @@
               </a:rPr>
               <a:t>个 → </a:t>
             </a:r>
-            <a:pPr algn="l" indent="0" marL="0">
-              <a:spcBef>
-                <a:spcPts val="600"/>
-              </a:spcBef>
-              <a:buNone/>
-            </a:pPr>
             <a:r>
               <a:rPr lang="en-US" sz="1150" b="1" dirty="0">
                 <a:solidFill>
@@ -20045,12 +19223,6 @@
               </a:rPr>
               <a:t>幢</a:t>
             </a:r>
-            <a:pPr algn="l" indent="0" marL="0">
-              <a:spcBef>
-                <a:spcPts val="600"/>
-              </a:spcBef>
-              <a:buNone/>
-            </a:pPr>
             <a:r>
               <a:rPr lang="en-US" sz="1150" dirty="0">
                 <a:solidFill>
@@ -20618,12 +19790,6 @@
               </a:rPr>
               <a:t>Teacher projects each </a:t>
             </a:r>
-            <a:pPr algn="l" indent="0" marL="0">
-              <a:lnSpc>
-                <a:spcPts val="1400"/>
-              </a:lnSpc>
-              <a:buNone/>
-            </a:pPr>
             <a:r>
               <a:rPr lang="en-US" sz="1000" b="1" dirty="0">
                 <a:solidFill>
@@ -20635,12 +19801,6 @@
               </a:rPr>
               <a:t>picture for 3 seconds</a:t>
             </a:r>
-            <a:pPr algn="l" indent="0" marL="0">
-              <a:lnSpc>
-                <a:spcPts val="1400"/>
-              </a:lnSpc>
-              <a:buNone/>
-            </a:pPr>
             <a:r>
               <a:rPr lang="en-US" sz="1000" dirty="0">
                 <a:solidFill>
@@ -20765,12 +19925,6 @@
               </a:rPr>
               <a:t>After naming, the </a:t>
             </a:r>
-            <a:pPr algn="l" indent="0" marL="0">
-              <a:lnSpc>
-                <a:spcPts val="1400"/>
-              </a:lnSpc>
-              <a:buNone/>
-            </a:pPr>
             <a:r>
               <a:rPr lang="en-US" sz="1000" b="1" dirty="0">
                 <a:solidFill>
@@ -20782,12 +19936,6 @@
               </a:rPr>
               <a:t>汉字 fades in</a:t>
             </a:r>
-            <a:pPr algn="l" indent="0" marL="0">
-              <a:lnSpc>
-                <a:spcPts val="1400"/>
-              </a:lnSpc>
-              <a:buNone/>
-            </a:pPr>
             <a:r>
               <a:rPr lang="en-US" sz="1000" dirty="0">
                 <a:solidFill>
@@ -20912,12 +20060,6 @@
               </a:rPr>
               <a:t>After all 8: display all at once. </a:t>
             </a:r>
-            <a:pPr algn="l" indent="0" marL="0">
-              <a:lnSpc>
-                <a:spcPts val="1400"/>
-              </a:lnSpc>
-              <a:buNone/>
-            </a:pPr>
             <a:r>
               <a:rPr lang="en-US" sz="1000" b="1" dirty="0">
                 <a:solidFill>
@@ -20929,12 +20071,6 @@
               </a:rPr>
               <a:t>Cold call</a:t>
             </a:r>
-            <a:pPr algn="l" indent="0" marL="0">
-              <a:lnSpc>
-                <a:spcPts val="1400"/>
-              </a:lnSpc>
-              <a:buNone/>
-            </a:pPr>
             <a:r>
               <a:rPr lang="en-US" sz="1000" dirty="0">
                 <a:solidFill>
@@ -21059,12 +20195,6 @@
               </a:rPr>
               <a:t>Final round: teacher says the </a:t>
             </a:r>
-            <a:pPr algn="l" indent="0" marL="0">
-              <a:lnSpc>
-                <a:spcPts val="1400"/>
-              </a:lnSpc>
-              <a:buNone/>
-            </a:pPr>
             <a:r>
               <a:rPr lang="en-US" sz="1000" b="1" dirty="0">
                 <a:solidFill>
@@ -21076,12 +20206,6 @@
               </a:rPr>
               <a:t>English name</a:t>
             </a:r>
-            <a:pPr algn="l" indent="0" marL="0">
-              <a:lnSpc>
-                <a:spcPts val="1400"/>
-              </a:lnSpc>
-              <a:buNone/>
-            </a:pPr>
             <a:r>
               <a:rPr lang="en-US" sz="1000" dirty="0">
                 <a:solidFill>
@@ -21093,12 +20217,6 @@
               </a:rPr>
               <a:t>, class chorally says the </a:t>
             </a:r>
-            <a:pPr algn="l" indent="0" marL="0">
-              <a:lnSpc>
-                <a:spcPts val="1400"/>
-              </a:lnSpc>
-              <a:buNone/>
-            </a:pPr>
             <a:r>
               <a:rPr lang="en-US" sz="1000" b="1" dirty="0">
                 <a:solidFill>
@@ -21110,12 +20228,6 @@
               </a:rPr>
               <a:t>Chinese</a:t>
             </a:r>
-            <a:pPr algn="l" indent="0" marL="0">
-              <a:lnSpc>
-                <a:spcPts val="1400"/>
-              </a:lnSpc>
-              <a:buNone/>
-            </a:pPr>
             <a:r>
               <a:rPr lang="en-US" sz="1000" dirty="0">
                 <a:solidFill>
@@ -21201,12 +20313,6 @@
               </a:rPr>
               <a:t>OTR 1:</a:t>
             </a:r>
-            <a:pPr algn="l" indent="0" marL="0">
-              <a:lnSpc>
-                <a:spcPts val="1215"/>
-              </a:lnSpc>
-              <a:buNone/>
-            </a:pPr>
             <a:r>
               <a:rPr lang="en-US" sz="900" dirty="0">
                 <a:solidFill>
